--- a/ゲーム科3年/00_前期/オンラインゲームプログラミングⅠ/01_接続.pptx
+++ b/ゲーム科3年/00_前期/オンラインゲームプログラミングⅠ/01_接続.pptx
@@ -9,9 +9,12 @@
     <p:sldId id="257" r:id="rId3"/>
     <p:sldId id="258" r:id="rId4"/>
     <p:sldId id="259" r:id="rId5"/>
-    <p:sldId id="260" r:id="rId6"/>
-    <p:sldId id="261" r:id="rId7"/>
-    <p:sldId id="262" r:id="rId8"/>
+    <p:sldId id="262" r:id="rId6"/>
+    <p:sldId id="263" r:id="rId7"/>
+    <p:sldId id="264" r:id="rId8"/>
+    <p:sldId id="260" r:id="rId9"/>
+    <p:sldId id="261" r:id="rId10"/>
+    <p:sldId id="265" r:id="rId11"/>
   </p:sldIdLst>
   <p:sldSz cx="12192000" cy="6858000"/>
   <p:notesSz cx="6858000" cy="9144000"/>
@@ -265,7 +268,7 @@
           <a:p>
             <a:fld id="{E9CC885B-4903-4D54-9A93-00025F12DED9}" type="datetimeFigureOut">
               <a:rPr kumimoji="1" lang="ja-JP" altLang="en-US" smtClean="0"/>
-              <a:t>2025/1/20</a:t>
+              <a:t>2025/3/16</a:t>
             </a:fld>
             <a:endParaRPr kumimoji="1" lang="ja-JP" altLang="en-US"/>
           </a:p>
@@ -495,7 +498,7 @@
           <a:p>
             <a:fld id="{E9CC885B-4903-4D54-9A93-00025F12DED9}" type="datetimeFigureOut">
               <a:rPr kumimoji="1" lang="ja-JP" altLang="en-US" smtClean="0"/>
-              <a:t>2025/1/20</a:t>
+              <a:t>2025/3/16</a:t>
             </a:fld>
             <a:endParaRPr kumimoji="1" lang="ja-JP" altLang="en-US"/>
           </a:p>
@@ -735,7 +738,7 @@
           <a:p>
             <a:fld id="{E9CC885B-4903-4D54-9A93-00025F12DED9}" type="datetimeFigureOut">
               <a:rPr kumimoji="1" lang="ja-JP" altLang="en-US" smtClean="0"/>
-              <a:t>2025/1/20</a:t>
+              <a:t>2025/3/16</a:t>
             </a:fld>
             <a:endParaRPr kumimoji="1" lang="ja-JP" altLang="en-US"/>
           </a:p>
@@ -965,7 +968,7 @@
           <a:p>
             <a:fld id="{E9CC885B-4903-4D54-9A93-00025F12DED9}" type="datetimeFigureOut">
               <a:rPr kumimoji="1" lang="ja-JP" altLang="en-US" smtClean="0"/>
-              <a:t>2025/1/20</a:t>
+              <a:t>2025/3/16</a:t>
             </a:fld>
             <a:endParaRPr kumimoji="1" lang="ja-JP" altLang="en-US"/>
           </a:p>
@@ -1240,7 +1243,7 @@
           <a:p>
             <a:fld id="{E9CC885B-4903-4D54-9A93-00025F12DED9}" type="datetimeFigureOut">
               <a:rPr kumimoji="1" lang="ja-JP" altLang="en-US" smtClean="0"/>
-              <a:t>2025/1/20</a:t>
+              <a:t>2025/3/16</a:t>
             </a:fld>
             <a:endParaRPr kumimoji="1" lang="ja-JP" altLang="en-US"/>
           </a:p>
@@ -1569,7 +1572,7 @@
           <a:p>
             <a:fld id="{E9CC885B-4903-4D54-9A93-00025F12DED9}" type="datetimeFigureOut">
               <a:rPr kumimoji="1" lang="ja-JP" altLang="en-US" smtClean="0"/>
-              <a:t>2025/1/20</a:t>
+              <a:t>2025/3/16</a:t>
             </a:fld>
             <a:endParaRPr kumimoji="1" lang="ja-JP" altLang="en-US"/>
           </a:p>
@@ -2045,7 +2048,7 @@
           <a:p>
             <a:fld id="{E9CC885B-4903-4D54-9A93-00025F12DED9}" type="datetimeFigureOut">
               <a:rPr kumimoji="1" lang="ja-JP" altLang="en-US" smtClean="0"/>
-              <a:t>2025/1/20</a:t>
+              <a:t>2025/3/16</a:t>
             </a:fld>
             <a:endParaRPr kumimoji="1" lang="ja-JP" altLang="en-US"/>
           </a:p>
@@ -2186,7 +2189,7 @@
           <a:p>
             <a:fld id="{E9CC885B-4903-4D54-9A93-00025F12DED9}" type="datetimeFigureOut">
               <a:rPr kumimoji="1" lang="ja-JP" altLang="en-US" smtClean="0"/>
-              <a:t>2025/1/20</a:t>
+              <a:t>2025/3/16</a:t>
             </a:fld>
             <a:endParaRPr kumimoji="1" lang="ja-JP" altLang="en-US"/>
           </a:p>
@@ -2299,7 +2302,7 @@
           <a:p>
             <a:fld id="{E9CC885B-4903-4D54-9A93-00025F12DED9}" type="datetimeFigureOut">
               <a:rPr kumimoji="1" lang="ja-JP" altLang="en-US" smtClean="0"/>
-              <a:t>2025/1/20</a:t>
+              <a:t>2025/3/16</a:t>
             </a:fld>
             <a:endParaRPr kumimoji="1" lang="ja-JP" altLang="en-US"/>
           </a:p>
@@ -2642,7 +2645,7 @@
           <a:p>
             <a:fld id="{E9CC885B-4903-4D54-9A93-00025F12DED9}" type="datetimeFigureOut">
               <a:rPr kumimoji="1" lang="ja-JP" altLang="en-US" smtClean="0"/>
-              <a:t>2025/1/20</a:t>
+              <a:t>2025/3/16</a:t>
             </a:fld>
             <a:endParaRPr kumimoji="1" lang="ja-JP" altLang="en-US"/>
           </a:p>
@@ -2930,7 +2933,7 @@
           <a:p>
             <a:fld id="{E9CC885B-4903-4D54-9A93-00025F12DED9}" type="datetimeFigureOut">
               <a:rPr kumimoji="1" lang="ja-JP" altLang="en-US" smtClean="0"/>
-              <a:t>2025/1/20</a:t>
+              <a:t>2025/3/16</a:t>
             </a:fld>
             <a:endParaRPr kumimoji="1" lang="ja-JP" altLang="en-US"/>
           </a:p>
@@ -3203,7 +3206,7 @@
           <a:p>
             <a:fld id="{E9CC885B-4903-4D54-9A93-00025F12DED9}" type="datetimeFigureOut">
               <a:rPr kumimoji="1" lang="ja-JP" altLang="en-US" smtClean="0"/>
-              <a:t>2025/1/20</a:t>
+              <a:t>2025/3/16</a:t>
             </a:fld>
             <a:endParaRPr kumimoji="1" lang="ja-JP" altLang="en-US"/>
           </a:p>
@@ -3670,7 +3673,7 @@
         <p:spPr>
           <a:xfrm>
             <a:off x="567542" y="1216429"/>
-            <a:ext cx="7571303" cy="1200329"/>
+            <a:ext cx="9417963" cy="830997"/>
           </a:xfrm>
           <a:prstGeom prst="rect">
             <a:avLst/>
@@ -3684,30 +3687,27 @@
           <a:lstStyle/>
           <a:p>
             <a:r>
+              <a:rPr lang="ja-JP" altLang="en-US" sz="2400" dirty="0"/>
+              <a:t>サーバークライアントを実装するために、</a:t>
+            </a:r>
+            <a:endParaRPr lang="en-US" altLang="ja-JP" sz="2400" dirty="0"/>
+          </a:p>
+          <a:p>
+            <a:r>
               <a:rPr kumimoji="1" lang="ja-JP" altLang="en-US" sz="2400" dirty="0"/>
-              <a:t>他の端末同士でデータをやり取りするには、</a:t>
-            </a:r>
-            <a:endParaRPr kumimoji="1" lang="en-US" altLang="ja-JP" sz="2400" dirty="0"/>
-          </a:p>
-          <a:p>
-            <a:r>
-              <a:rPr lang="ja-JP" altLang="en-US" sz="2400" b="1" dirty="0">
+              <a:t>まずは</a:t>
+            </a:r>
+            <a:r>
+              <a:rPr kumimoji="1" lang="ja-JP" altLang="en-US" sz="2400" b="1" dirty="0">
                 <a:solidFill>
                   <a:srgbClr val="FF0000"/>
                 </a:solidFill>
               </a:rPr>
-              <a:t>オンライン上で端末同士を接続</a:t>
-            </a:r>
-            <a:r>
-              <a:rPr lang="ja-JP" altLang="en-US" sz="2400" dirty="0"/>
-              <a:t>する必要があります。</a:t>
-            </a:r>
-            <a:endParaRPr lang="en-US" altLang="ja-JP" sz="2400" dirty="0"/>
-          </a:p>
-          <a:p>
+              <a:t>クライアントからサーバーに接続</a:t>
+            </a:r>
             <a:r>
               <a:rPr kumimoji="1" lang="ja-JP" altLang="en-US" sz="2400" dirty="0"/>
-              <a:t>まずはその接続処理を作ります。</a:t>
+              <a:t>する仕組みを実装します。</a:t>
             </a:r>
             <a:endParaRPr kumimoji="1" lang="en-US" altLang="ja-JP" sz="2400" dirty="0"/>
           </a:p>
@@ -3801,7 +3801,10 @@
           <a:lstStyle/>
           <a:p>
             <a:pPr algn="ctr"/>
-            <a:endParaRPr kumimoji="1" lang="ja-JP" altLang="en-US"/>
+            <a:r>
+              <a:rPr kumimoji="1" lang="ja-JP" altLang="en-US" b="1" dirty="0"/>
+              <a:t>クライアント</a:t>
+            </a:r>
           </a:p>
         </p:txBody>
       </p:sp>
@@ -3847,16 +3850,19 @@
           <a:lstStyle/>
           <a:p>
             <a:pPr algn="ctr"/>
-            <a:endParaRPr kumimoji="1" lang="ja-JP" altLang="en-US"/>
-          </a:p>
-        </p:txBody>
-      </p:sp>
-      <p:sp>
-        <p:nvSpPr>
-          <p:cNvPr id="7" name="矢印: 左右 6">
-            <a:extLst>
-              <a:ext uri="{FF2B5EF4-FFF2-40B4-BE49-F238E27FC236}">
-                <a16:creationId xmlns:a16="http://schemas.microsoft.com/office/drawing/2014/main" id="{21E81084-22AB-45CA-8FDC-FAB0F60E4E93}"/>
+            <a:r>
+              <a:rPr kumimoji="1" lang="ja-JP" altLang="en-US" b="1" dirty="0"/>
+              <a:t>サーバー</a:t>
+            </a:r>
+          </a:p>
+        </p:txBody>
+      </p:sp>
+      <p:sp>
+        <p:nvSpPr>
+          <p:cNvPr id="8" name="矢印: 右 7">
+            <a:extLst>
+              <a:ext uri="{FF2B5EF4-FFF2-40B4-BE49-F238E27FC236}">
+                <a16:creationId xmlns:a16="http://schemas.microsoft.com/office/drawing/2014/main" id="{E1E95D2A-BF41-4763-929E-6365C8181634}"/>
               </a:ext>
             </a:extLst>
           </p:cNvPr>
@@ -3865,10 +3871,10 @@
         </p:nvSpPr>
         <p:spPr>
           <a:xfrm>
-            <a:off x="2370942" y="3513192"/>
-            <a:ext cx="2302933" cy="770466"/>
-          </a:xfrm>
-          <a:prstGeom prst="leftRightArrow">
+            <a:off x="2459421" y="3513192"/>
+            <a:ext cx="2280745" cy="680436"/>
+          </a:xfrm>
+          <a:prstGeom prst="rightArrow">
             <a:avLst/>
           </a:prstGeom>
         </p:spPr>
@@ -3904,6 +3910,139 @@
     <p:extLst>
       <p:ext uri="{BB962C8B-B14F-4D97-AF65-F5344CB8AC3E}">
         <p14:creationId xmlns:p14="http://schemas.microsoft.com/office/powerpoint/2010/main" val="410028988"/>
+      </p:ext>
+    </p:extLst>
+  </p:cSld>
+  <p:clrMapOvr>
+    <a:masterClrMapping/>
+  </p:clrMapOvr>
+</p:sld>
+</file>
+
+<file path=ppt/slides/slide10.xml><?xml version="1.0" encoding="utf-8"?>
+<p:sld xmlns:a="http://schemas.openxmlformats.org/drawingml/2006/main" xmlns:r="http://schemas.openxmlformats.org/officeDocument/2006/relationships" xmlns:p="http://schemas.openxmlformats.org/presentationml/2006/main">
+  <p:cSld>
+    <p:spTree>
+      <p:nvGrpSpPr>
+        <p:cNvPr id="1" name=""/>
+        <p:cNvGrpSpPr/>
+        <p:nvPr/>
+      </p:nvGrpSpPr>
+      <p:grpSpPr>
+        <a:xfrm>
+          <a:off x="0" y="0"/>
+          <a:ext cx="0" cy="0"/>
+          <a:chOff x="0" y="0"/>
+          <a:chExt cx="0" cy="0"/>
+        </a:xfrm>
+      </p:grpSpPr>
+      <p:sp>
+        <p:nvSpPr>
+          <p:cNvPr id="4" name="テキスト ボックス 3">
+            <a:extLst>
+              <a:ext uri="{FF2B5EF4-FFF2-40B4-BE49-F238E27FC236}">
+                <a16:creationId xmlns:a16="http://schemas.microsoft.com/office/drawing/2014/main" id="{5A13BF46-B8C5-48AA-8308-C9ECFF431A18}"/>
+              </a:ext>
+            </a:extLst>
+          </p:cNvPr>
+          <p:cNvSpPr txBox="1"/>
+          <p:nvPr/>
+        </p:nvSpPr>
+        <p:spPr>
+          <a:xfrm>
+            <a:off x="567542" y="491954"/>
+            <a:ext cx="2646878" cy="584775"/>
+          </a:xfrm>
+          <a:prstGeom prst="rect">
+            <a:avLst/>
+          </a:prstGeom>
+          <a:noFill/>
+        </p:spPr>
+        <p:txBody>
+          <a:bodyPr wrap="none" rtlCol="0">
+            <a:spAutoFit/>
+          </a:bodyPr>
+          <a:lstStyle/>
+          <a:p>
+            <a:r>
+              <a:rPr kumimoji="1" lang="ja-JP" altLang="en-US" sz="3200" b="1" u="sng" dirty="0"/>
+              <a:t>サーバー側へ</a:t>
+            </a:r>
+          </a:p>
+        </p:txBody>
+      </p:sp>
+      <p:sp>
+        <p:nvSpPr>
+          <p:cNvPr id="6" name="テキスト ボックス 5">
+            <a:extLst>
+              <a:ext uri="{FF2B5EF4-FFF2-40B4-BE49-F238E27FC236}">
+                <a16:creationId xmlns:a16="http://schemas.microsoft.com/office/drawing/2014/main" id="{55830AD6-028B-4C4E-80BF-B70DFC1C3A46}"/>
+              </a:ext>
+            </a:extLst>
+          </p:cNvPr>
+          <p:cNvSpPr txBox="1"/>
+          <p:nvPr/>
+        </p:nvSpPr>
+        <p:spPr>
+          <a:xfrm>
+            <a:off x="567542" y="1216429"/>
+            <a:ext cx="9417963" cy="1938992"/>
+          </a:xfrm>
+          <a:prstGeom prst="rect">
+            <a:avLst/>
+          </a:prstGeom>
+          <a:noFill/>
+        </p:spPr>
+        <p:txBody>
+          <a:bodyPr wrap="none" rtlCol="0">
+            <a:spAutoFit/>
+          </a:bodyPr>
+          <a:lstStyle/>
+          <a:p>
+            <a:r>
+              <a:rPr lang="ja-JP" altLang="en-US" sz="2400" dirty="0"/>
+              <a:t>クライアント側の接続は実装しました。</a:t>
+            </a:r>
+            <a:endParaRPr lang="en-US" altLang="ja-JP" sz="2400" dirty="0"/>
+          </a:p>
+          <a:p>
+            <a:endParaRPr lang="en-US" altLang="ja-JP" sz="2400" dirty="0"/>
+          </a:p>
+          <a:p>
+            <a:r>
+              <a:rPr lang="ja-JP" altLang="en-US" sz="2400" dirty="0"/>
+              <a:t>サーバー側では、</a:t>
+            </a:r>
+            <a:endParaRPr lang="en-US" altLang="ja-JP" sz="2400" dirty="0"/>
+          </a:p>
+          <a:p>
+            <a:r>
+              <a:rPr lang="ja-JP" altLang="en-US" sz="2400" b="1" dirty="0">
+                <a:solidFill>
+                  <a:srgbClr val="FF0000"/>
+                </a:solidFill>
+              </a:rPr>
+              <a:t>接続してきたクライアントを受け入れて記録する</a:t>
+            </a:r>
+            <a:r>
+              <a:rPr lang="ja-JP" altLang="en-US" sz="2400" dirty="0"/>
+              <a:t>必要があります。</a:t>
+            </a:r>
+            <a:endParaRPr lang="en-US" altLang="ja-JP" sz="2400" dirty="0"/>
+          </a:p>
+          <a:p>
+            <a:r>
+              <a:rPr lang="ja-JP" altLang="en-US" sz="2400" dirty="0"/>
+              <a:t>次のスライドで実装します。</a:t>
+            </a:r>
+            <a:endParaRPr lang="en-US" altLang="ja-JP" sz="2400" dirty="0"/>
+          </a:p>
+        </p:txBody>
+      </p:sp>
+    </p:spTree>
+    <p:extLst>
+      <p:ext uri="{BB962C8B-B14F-4D97-AF65-F5344CB8AC3E}">
+        <p14:creationId xmlns:p14="http://schemas.microsoft.com/office/powerpoint/2010/main" val="399999188"/>
       </p:ext>
     </p:extLst>
   </p:cSld>
@@ -3980,7 +4119,7 @@
         <p:spPr>
           <a:xfrm>
             <a:off x="567542" y="1216429"/>
-            <a:ext cx="6445995" cy="461665"/>
+            <a:ext cx="9092554" cy="461665"/>
           </a:xfrm>
           <a:prstGeom prst="rect">
             <a:avLst/>
@@ -3994,18 +4133,22 @@
           <a:lstStyle/>
           <a:p>
             <a:r>
-              <a:rPr kumimoji="1" lang="en-US" altLang="ja-JP" sz="2400" b="1" dirty="0" err="1">
+              <a:rPr lang="ja-JP" altLang="en-US" sz="2400" dirty="0"/>
+              <a:t>クライアントプロジェクトの</a:t>
+            </a:r>
+            <a:r>
+              <a:rPr lang="en-US" altLang="ja-JP" sz="2400" b="1" dirty="0">
                 <a:solidFill>
                   <a:srgbClr val="FF0000"/>
                 </a:solidFill>
               </a:rPr>
-              <a:t>NetworkManager.h</a:t>
-            </a:r>
-            <a:r>
-              <a:rPr kumimoji="1" lang="ja-JP" altLang="en-US" sz="2400" dirty="0"/>
-              <a:t>を作ります。（その１）</a:t>
-            </a:r>
-            <a:endParaRPr kumimoji="1" lang="en-US" altLang="ja-JP" sz="2400" dirty="0"/>
+              <a:t>Client.cpp</a:t>
+            </a:r>
+            <a:r>
+              <a:rPr lang="ja-JP" altLang="en-US" sz="2400" dirty="0"/>
+              <a:t>を書きます。（その１）</a:t>
+            </a:r>
+            <a:endParaRPr lang="en-US" altLang="ja-JP" sz="2400" dirty="0"/>
           </a:p>
         </p:txBody>
       </p:sp>
@@ -4014,7 +4157,7 @@
           <p:cNvPr id="9" name="図 8">
             <a:extLst>
               <a:ext uri="{FF2B5EF4-FFF2-40B4-BE49-F238E27FC236}">
-                <a16:creationId xmlns:a16="http://schemas.microsoft.com/office/drawing/2014/main" id="{FC79C99C-C791-4EF5-B4C2-8ED2F6C60FA1}"/>
+                <a16:creationId xmlns:a16="http://schemas.microsoft.com/office/drawing/2014/main" id="{3421A57E-388C-481F-AF11-B14D4784753D}"/>
               </a:ext>
             </a:extLst>
           </p:cNvPr>
@@ -4031,18 +4174,70 @@
         </p:blipFill>
         <p:spPr>
           <a:xfrm>
-            <a:off x="567542" y="1817793"/>
-            <a:ext cx="7279075" cy="4218939"/>
+            <a:off x="567542" y="1817794"/>
+            <a:ext cx="7580075" cy="4215144"/>
           </a:xfrm>
           <a:prstGeom prst="rect">
             <a:avLst/>
           </a:prstGeom>
         </p:spPr>
       </p:pic>
+      <p:sp>
+        <p:nvSpPr>
+          <p:cNvPr id="10" name="正方形/長方形 9">
+            <a:extLst>
+              <a:ext uri="{FF2B5EF4-FFF2-40B4-BE49-F238E27FC236}">
+                <a16:creationId xmlns:a16="http://schemas.microsoft.com/office/drawing/2014/main" id="{9063438F-E08C-4F1C-A76F-821995C31FAC}"/>
+              </a:ext>
+            </a:extLst>
+          </p:cNvPr>
+          <p:cNvSpPr/>
+          <p:nvPr/>
+        </p:nvSpPr>
+        <p:spPr>
+          <a:xfrm>
+            <a:off x="2175641" y="2196662"/>
+            <a:ext cx="5801711" cy="3258207"/>
+          </a:xfrm>
+          <a:prstGeom prst="rect">
+            <a:avLst/>
+          </a:prstGeom>
+          <a:noFill/>
+          <a:ln w="38100">
+            <a:solidFill>
+              <a:srgbClr val="FF0000"/>
+            </a:solidFill>
+          </a:ln>
+        </p:spPr>
+        <p:style>
+          <a:lnRef idx="2">
+            <a:schemeClr val="accent1">
+              <a:shade val="50000"/>
+            </a:schemeClr>
+          </a:lnRef>
+          <a:fillRef idx="1">
+            <a:schemeClr val="accent1"/>
+          </a:fillRef>
+          <a:effectRef idx="0">
+            <a:schemeClr val="accent1"/>
+          </a:effectRef>
+          <a:fontRef idx="minor">
+            <a:schemeClr val="lt1"/>
+          </a:fontRef>
+        </p:style>
+        <p:txBody>
+          <a:bodyPr rtlCol="0" anchor="ctr"/>
+          <a:lstStyle/>
+          <a:p>
+            <a:pPr algn="ctr"/>
+            <a:endParaRPr kumimoji="1" lang="ja-JP" altLang="en-US"/>
+          </a:p>
+        </p:txBody>
+      </p:sp>
     </p:spTree>
     <p:extLst>
       <p:ext uri="{BB962C8B-B14F-4D97-AF65-F5344CB8AC3E}">
-        <p14:creationId xmlns:p14="http://schemas.microsoft.com/office/powerpoint/2010/main" val="3479950781"/>
+        <p14:creationId xmlns:p14="http://schemas.microsoft.com/office/powerpoint/2010/main" val="198014122"/>
       </p:ext>
     </p:extLst>
   </p:cSld>
@@ -4119,7 +4314,7 @@
         <p:spPr>
           <a:xfrm>
             <a:off x="567542" y="1216429"/>
-            <a:ext cx="6445995" cy="461665"/>
+            <a:ext cx="9092554" cy="461665"/>
           </a:xfrm>
           <a:prstGeom prst="rect">
             <a:avLst/>
@@ -4133,27 +4328,31 @@
           <a:lstStyle/>
           <a:p>
             <a:r>
-              <a:rPr kumimoji="1" lang="en-US" altLang="ja-JP" sz="2400" b="1" dirty="0" err="1">
+              <a:rPr lang="ja-JP" altLang="en-US" sz="2400" dirty="0"/>
+              <a:t>クライアントプロジェクトの</a:t>
+            </a:r>
+            <a:r>
+              <a:rPr lang="en-US" altLang="ja-JP" sz="2400" b="1" dirty="0">
                 <a:solidFill>
                   <a:srgbClr val="FF0000"/>
                 </a:solidFill>
               </a:rPr>
-              <a:t>NetworkManager.h</a:t>
-            </a:r>
-            <a:r>
-              <a:rPr kumimoji="1" lang="ja-JP" altLang="en-US" sz="2400" dirty="0"/>
-              <a:t>を作ります。（その２）</a:t>
-            </a:r>
-            <a:endParaRPr kumimoji="1" lang="en-US" altLang="ja-JP" sz="2400" dirty="0"/>
+              <a:t>Client.cpp</a:t>
+            </a:r>
+            <a:r>
+              <a:rPr lang="ja-JP" altLang="en-US" sz="2400" dirty="0"/>
+              <a:t>を書きます。（その２）</a:t>
+            </a:r>
+            <a:endParaRPr lang="en-US" altLang="ja-JP" sz="2400" dirty="0"/>
           </a:p>
         </p:txBody>
       </p:sp>
       <p:pic>
         <p:nvPicPr>
-          <p:cNvPr id="3" name="図 2">
-            <a:extLst>
-              <a:ext uri="{FF2B5EF4-FFF2-40B4-BE49-F238E27FC236}">
-                <a16:creationId xmlns:a16="http://schemas.microsoft.com/office/drawing/2014/main" id="{18F71263-D9D1-4CD8-8331-F5D59B82476E}"/>
+          <p:cNvPr id="7" name="図 6">
+            <a:extLst>
+              <a:ext uri="{FF2B5EF4-FFF2-40B4-BE49-F238E27FC236}">
+                <a16:creationId xmlns:a16="http://schemas.microsoft.com/office/drawing/2014/main" id="{9634EB64-065D-4BD7-B935-F1EA07EEF3FA}"/>
               </a:ext>
             </a:extLst>
           </p:cNvPr>
@@ -4170,18 +4369,70 @@
         </p:blipFill>
         <p:spPr>
           <a:xfrm>
-            <a:off x="567542" y="1817794"/>
-            <a:ext cx="10002646" cy="4658375"/>
+            <a:off x="567542" y="1828576"/>
+            <a:ext cx="9208513" cy="4303283"/>
           </a:xfrm>
           <a:prstGeom prst="rect">
             <a:avLst/>
           </a:prstGeom>
         </p:spPr>
       </p:pic>
+      <p:sp>
+        <p:nvSpPr>
+          <p:cNvPr id="11" name="正方形/長方形 10">
+            <a:extLst>
+              <a:ext uri="{FF2B5EF4-FFF2-40B4-BE49-F238E27FC236}">
+                <a16:creationId xmlns:a16="http://schemas.microsoft.com/office/drawing/2014/main" id="{DA05453C-E89F-4863-8F32-F20E0082FDFC}"/>
+              </a:ext>
+            </a:extLst>
+          </p:cNvPr>
+          <p:cNvSpPr/>
+          <p:nvPr/>
+        </p:nvSpPr>
+        <p:spPr>
+          <a:xfrm>
+            <a:off x="2234681" y="3144644"/>
+            <a:ext cx="7722637" cy="2783190"/>
+          </a:xfrm>
+          <a:prstGeom prst="rect">
+            <a:avLst/>
+          </a:prstGeom>
+          <a:noFill/>
+          <a:ln w="38100">
+            <a:solidFill>
+              <a:srgbClr val="FF0000"/>
+            </a:solidFill>
+          </a:ln>
+        </p:spPr>
+        <p:style>
+          <a:lnRef idx="2">
+            <a:schemeClr val="accent1">
+              <a:shade val="50000"/>
+            </a:schemeClr>
+          </a:lnRef>
+          <a:fillRef idx="1">
+            <a:schemeClr val="accent1"/>
+          </a:fillRef>
+          <a:effectRef idx="0">
+            <a:schemeClr val="accent1"/>
+          </a:effectRef>
+          <a:fontRef idx="minor">
+            <a:schemeClr val="lt1"/>
+          </a:fontRef>
+        </p:style>
+        <p:txBody>
+          <a:bodyPr rtlCol="0" anchor="ctr"/>
+          <a:lstStyle/>
+          <a:p>
+            <a:pPr algn="ctr"/>
+            <a:endParaRPr kumimoji="1" lang="ja-JP" altLang="en-US"/>
+          </a:p>
+        </p:txBody>
+      </p:sp>
     </p:spTree>
     <p:extLst>
       <p:ext uri="{BB962C8B-B14F-4D97-AF65-F5344CB8AC3E}">
-        <p14:creationId xmlns:p14="http://schemas.microsoft.com/office/powerpoint/2010/main" val="3917797388"/>
+        <p14:creationId xmlns:p14="http://schemas.microsoft.com/office/powerpoint/2010/main" val="526685735"/>
       </p:ext>
     </p:extLst>
   </p:cSld>
@@ -4258,7 +4509,7 @@
         <p:spPr>
           <a:xfrm>
             <a:off x="567542" y="1216429"/>
-            <a:ext cx="6445995" cy="461665"/>
+            <a:ext cx="9092554" cy="461665"/>
           </a:xfrm>
           <a:prstGeom prst="rect">
             <a:avLst/>
@@ -4272,18 +4523,22 @@
           <a:lstStyle/>
           <a:p>
             <a:r>
-              <a:rPr kumimoji="1" lang="en-US" altLang="ja-JP" sz="2400" b="1" dirty="0" err="1">
+              <a:rPr lang="ja-JP" altLang="en-US" sz="2400" dirty="0"/>
+              <a:t>クライアントプロジェクトの</a:t>
+            </a:r>
+            <a:r>
+              <a:rPr lang="en-US" altLang="ja-JP" sz="2400" b="1" dirty="0">
                 <a:solidFill>
                   <a:srgbClr val="FF0000"/>
                 </a:solidFill>
               </a:rPr>
-              <a:t>NetworkManager.h</a:t>
-            </a:r>
-            <a:r>
-              <a:rPr kumimoji="1" lang="ja-JP" altLang="en-US" sz="2400" dirty="0"/>
-              <a:t>を作ります。（その３）</a:t>
-            </a:r>
-            <a:endParaRPr kumimoji="1" lang="en-US" altLang="ja-JP" sz="2400" dirty="0"/>
+              <a:t>Client.cpp</a:t>
+            </a:r>
+            <a:r>
+              <a:rPr lang="ja-JP" altLang="en-US" sz="2400" dirty="0"/>
+              <a:t>を書きます。（その３）</a:t>
+            </a:r>
+            <a:endParaRPr lang="en-US" altLang="ja-JP" sz="2400" dirty="0"/>
           </a:p>
         </p:txBody>
       </p:sp>
@@ -4292,7 +4547,7 @@
           <p:cNvPr id="5" name="図 4">
             <a:extLst>
               <a:ext uri="{FF2B5EF4-FFF2-40B4-BE49-F238E27FC236}">
-                <a16:creationId xmlns:a16="http://schemas.microsoft.com/office/drawing/2014/main" id="{D01554DE-3434-43FA-B439-783281B16880}"/>
+                <a16:creationId xmlns:a16="http://schemas.microsoft.com/office/drawing/2014/main" id="{1E5812EE-67B1-44D5-AD13-8DD879E32923}"/>
               </a:ext>
             </a:extLst>
           </p:cNvPr>
@@ -4309,18 +4564,70 @@
         </p:blipFill>
         <p:spPr>
           <a:xfrm>
-            <a:off x="567542" y="1817794"/>
-            <a:ext cx="7844845" cy="3583939"/>
+            <a:off x="567541" y="1820422"/>
+            <a:ext cx="6862471" cy="3821149"/>
           </a:xfrm>
           <a:prstGeom prst="rect">
             <a:avLst/>
           </a:prstGeom>
         </p:spPr>
       </p:pic>
+      <p:sp>
+        <p:nvSpPr>
+          <p:cNvPr id="9" name="正方形/長方形 8">
+            <a:extLst>
+              <a:ext uri="{FF2B5EF4-FFF2-40B4-BE49-F238E27FC236}">
+                <a16:creationId xmlns:a16="http://schemas.microsoft.com/office/drawing/2014/main" id="{5B83D369-27E7-4743-A5DF-4489A5040E78}"/>
+              </a:ext>
+            </a:extLst>
+          </p:cNvPr>
+          <p:cNvSpPr/>
+          <p:nvPr/>
+        </p:nvSpPr>
+        <p:spPr>
+          <a:xfrm>
+            <a:off x="2175641" y="3132083"/>
+            <a:ext cx="5254371" cy="1818289"/>
+          </a:xfrm>
+          <a:prstGeom prst="rect">
+            <a:avLst/>
+          </a:prstGeom>
+          <a:noFill/>
+          <a:ln w="38100">
+            <a:solidFill>
+              <a:srgbClr val="FF0000"/>
+            </a:solidFill>
+          </a:ln>
+        </p:spPr>
+        <p:style>
+          <a:lnRef idx="2">
+            <a:schemeClr val="accent1">
+              <a:shade val="50000"/>
+            </a:schemeClr>
+          </a:lnRef>
+          <a:fillRef idx="1">
+            <a:schemeClr val="accent1"/>
+          </a:fillRef>
+          <a:effectRef idx="0">
+            <a:schemeClr val="accent1"/>
+          </a:effectRef>
+          <a:fontRef idx="minor">
+            <a:schemeClr val="lt1"/>
+          </a:fontRef>
+        </p:style>
+        <p:txBody>
+          <a:bodyPr rtlCol="0" anchor="ctr"/>
+          <a:lstStyle/>
+          <a:p>
+            <a:pPr algn="ctr"/>
+            <a:endParaRPr kumimoji="1" lang="ja-JP" altLang="en-US"/>
+          </a:p>
+        </p:txBody>
+      </p:sp>
     </p:spTree>
     <p:extLst>
       <p:ext uri="{BB962C8B-B14F-4D97-AF65-F5344CB8AC3E}">
-        <p14:creationId xmlns:p14="http://schemas.microsoft.com/office/powerpoint/2010/main" val="2408434460"/>
+        <p14:creationId xmlns:p14="http://schemas.microsoft.com/office/powerpoint/2010/main" val="1561280601"/>
       </p:ext>
     </p:extLst>
   </p:cSld>
@@ -4362,7 +4669,7 @@
         <p:spPr>
           <a:xfrm>
             <a:off x="567542" y="491954"/>
-            <a:ext cx="1005403" cy="584775"/>
+            <a:ext cx="1943161" cy="584775"/>
           </a:xfrm>
           <a:prstGeom prst="rect">
             <a:avLst/>
@@ -4377,7 +4684,7 @@
           <a:p>
             <a:r>
               <a:rPr kumimoji="1" lang="ja-JP" altLang="en-US" sz="3200" b="1" u="sng" dirty="0"/>
-              <a:t>接続</a:t>
+              <a:t>接続 解説</a:t>
             </a:r>
           </a:p>
         </p:txBody>
@@ -4397,7 +4704,7 @@
         <p:spPr>
           <a:xfrm>
             <a:off x="567542" y="1216429"/>
-            <a:ext cx="6803466" cy="461665"/>
+            <a:ext cx="9725739" cy="830997"/>
           </a:xfrm>
           <a:prstGeom prst="rect">
             <a:avLst/>
@@ -4411,27 +4718,54 @@
           <a:lstStyle/>
           <a:p>
             <a:r>
-              <a:rPr kumimoji="1" lang="en-US" altLang="ja-JP" sz="2400" b="1" dirty="0">
+              <a:rPr lang="ja-JP" altLang="en-US" sz="2400" dirty="0"/>
+              <a:t>端末と接続するには</a:t>
+            </a:r>
+            <a:r>
+              <a:rPr lang="en-US" altLang="ja-JP" sz="2400" b="1" dirty="0" err="1">
+                <a:solidFill>
+                  <a:srgbClr val="0070C0"/>
+                </a:solidFill>
+              </a:rPr>
+              <a:t>ConnectNetwork</a:t>
+            </a:r>
+            <a:r>
+              <a:rPr lang="ja-JP" altLang="en-US" sz="2400" b="1" dirty="0">
+                <a:solidFill>
+                  <a:srgbClr val="0070C0"/>
+                </a:solidFill>
+              </a:rPr>
+              <a:t>関数</a:t>
+            </a:r>
+            <a:r>
+              <a:rPr lang="ja-JP" altLang="en-US" sz="2400" dirty="0"/>
+              <a:t>を使います。</a:t>
+            </a:r>
+            <a:endParaRPr lang="en-US" altLang="ja-JP" sz="2400" dirty="0"/>
+          </a:p>
+          <a:p>
+            <a:r>
+              <a:rPr lang="ja-JP" altLang="en-US" sz="2400" b="1" dirty="0">
                 <a:solidFill>
                   <a:srgbClr val="FF0000"/>
                 </a:solidFill>
               </a:rPr>
-              <a:t>NetworkManager.cpp</a:t>
-            </a:r>
-            <a:r>
-              <a:rPr kumimoji="1" lang="ja-JP" altLang="en-US" sz="2400" dirty="0"/>
-              <a:t>を作ります。（その１）</a:t>
-            </a:r>
-            <a:endParaRPr kumimoji="1" lang="en-US" altLang="ja-JP" sz="2400" dirty="0"/>
+              <a:t>接続したのが誰かをハンドルで識別</a:t>
+            </a:r>
+            <a:r>
+              <a:rPr lang="ja-JP" altLang="en-US" sz="2400" dirty="0"/>
+              <a:t>するので取っておきましょう。</a:t>
+            </a:r>
+            <a:endParaRPr lang="en-US" altLang="ja-JP" sz="2400" dirty="0"/>
           </a:p>
         </p:txBody>
       </p:sp>
       <p:pic>
         <p:nvPicPr>
-          <p:cNvPr id="3" name="図 2">
-            <a:extLst>
-              <a:ext uri="{FF2B5EF4-FFF2-40B4-BE49-F238E27FC236}">
-                <a16:creationId xmlns:a16="http://schemas.microsoft.com/office/drawing/2014/main" id="{CF01A905-966B-4341-A1CC-1F09C0890C8F}"/>
+          <p:cNvPr id="8" name="図 7">
+            <a:extLst>
+              <a:ext uri="{FF2B5EF4-FFF2-40B4-BE49-F238E27FC236}">
+                <a16:creationId xmlns:a16="http://schemas.microsoft.com/office/drawing/2014/main" id="{37B2085B-B9B3-46DF-8339-28EA35CC254A}"/>
               </a:ext>
             </a:extLst>
           </p:cNvPr>
@@ -4448,8 +4782,8 @@
         </p:blipFill>
         <p:spPr>
           <a:xfrm>
-            <a:off x="567542" y="1817794"/>
-            <a:ext cx="6124546" cy="4684606"/>
+            <a:off x="567542" y="2187126"/>
+            <a:ext cx="9208513" cy="4303283"/>
           </a:xfrm>
           <a:prstGeom prst="rect">
             <a:avLst/>
@@ -4459,7 +4793,7 @@
     </p:spTree>
     <p:extLst>
       <p:ext uri="{BB962C8B-B14F-4D97-AF65-F5344CB8AC3E}">
-        <p14:creationId xmlns:p14="http://schemas.microsoft.com/office/powerpoint/2010/main" val="190286598"/>
+        <p14:creationId xmlns:p14="http://schemas.microsoft.com/office/powerpoint/2010/main" val="3321039171"/>
       </p:ext>
     </p:extLst>
   </p:cSld>
@@ -4501,7 +4835,7 @@
         <p:spPr>
           <a:xfrm>
             <a:off x="567542" y="491954"/>
-            <a:ext cx="1005403" cy="584775"/>
+            <a:ext cx="1943161" cy="584775"/>
           </a:xfrm>
           <a:prstGeom prst="rect">
             <a:avLst/>
@@ -4516,7 +4850,7 @@
           <a:p>
             <a:r>
               <a:rPr kumimoji="1" lang="ja-JP" altLang="en-US" sz="3200" b="1" u="sng" dirty="0"/>
-              <a:t>接続</a:t>
+              <a:t>接続 解説</a:t>
             </a:r>
           </a:p>
         </p:txBody>
@@ -4536,7 +4870,7 @@
         <p:spPr>
           <a:xfrm>
             <a:off x="567542" y="1216429"/>
-            <a:ext cx="6803466" cy="461665"/>
+            <a:ext cx="9401933" cy="830997"/>
           </a:xfrm>
           <a:prstGeom prst="rect">
             <a:avLst/>
@@ -4550,27 +4884,78 @@
           <a:lstStyle/>
           <a:p>
             <a:r>
-              <a:rPr kumimoji="1" lang="en-US" altLang="ja-JP" sz="2400" b="1" dirty="0">
+              <a:rPr lang="en-US" altLang="ja-JP" sz="2400" dirty="0"/>
+              <a:t>IP</a:t>
+            </a:r>
+            <a:r>
+              <a:rPr lang="ja-JP" altLang="en-US" sz="2400" dirty="0"/>
+              <a:t>アドレスは</a:t>
+            </a:r>
+            <a:r>
+              <a:rPr lang="en-US" altLang="ja-JP" sz="2400" dirty="0" err="1"/>
+              <a:t>DxLib</a:t>
+            </a:r>
+            <a:r>
+              <a:rPr lang="ja-JP" altLang="en-US" sz="2400" dirty="0"/>
+              <a:t>の</a:t>
+            </a:r>
+            <a:r>
+              <a:rPr lang="en-US" altLang="ja-JP" sz="2400" b="1" dirty="0">
+                <a:solidFill>
+                  <a:srgbClr val="00B050"/>
+                </a:solidFill>
+              </a:rPr>
+              <a:t>IPDATA</a:t>
+            </a:r>
+            <a:r>
+              <a:rPr lang="ja-JP" altLang="en-US" sz="2400" b="1" dirty="0">
+                <a:solidFill>
+                  <a:srgbClr val="00B050"/>
+                </a:solidFill>
+              </a:rPr>
+              <a:t>構造体</a:t>
+            </a:r>
+            <a:r>
+              <a:rPr lang="ja-JP" altLang="en-US" sz="2400" dirty="0"/>
+              <a:t>に保存します。（</a:t>
+            </a:r>
+            <a:r>
+              <a:rPr lang="en-US" altLang="ja-JP" sz="2400" b="1" dirty="0">
                 <a:solidFill>
                   <a:srgbClr val="FF0000"/>
                 </a:solidFill>
               </a:rPr>
-              <a:t>NetworkManager.cpp</a:t>
-            </a:r>
-            <a:r>
-              <a:rPr kumimoji="1" lang="ja-JP" altLang="en-US" sz="2400" dirty="0"/>
-              <a:t>を作ります。（その２）</a:t>
-            </a:r>
-            <a:endParaRPr kumimoji="1" lang="en-US" altLang="ja-JP" sz="2400" dirty="0"/>
+              <a:t>Main.cpp</a:t>
+            </a:r>
+            <a:r>
+              <a:rPr lang="ja-JP" altLang="en-US" sz="2400" dirty="0"/>
+              <a:t>）</a:t>
+            </a:r>
+            <a:endParaRPr lang="en-US" altLang="ja-JP" sz="2400" dirty="0"/>
+          </a:p>
+          <a:p>
+            <a:r>
+              <a:rPr lang="ja-JP" altLang="en-US" sz="2400" dirty="0"/>
+              <a:t>自身の端末の</a:t>
+            </a:r>
+            <a:r>
+              <a:rPr lang="en-US" altLang="ja-JP" sz="2400" dirty="0"/>
+              <a:t>IP</a:t>
+            </a:r>
+            <a:r>
+              <a:rPr lang="ja-JP" altLang="en-US" sz="2400" dirty="0"/>
+              <a:t>アドレスを調べて記載しましょう。</a:t>
+            </a:r>
+            <a:endParaRPr lang="en-US" altLang="ja-JP" sz="2400" dirty="0"/>
           </a:p>
         </p:txBody>
       </p:sp>
       <p:pic>
         <p:nvPicPr>
-          <p:cNvPr id="5" name="図 4">
-            <a:extLst>
-              <a:ext uri="{FF2B5EF4-FFF2-40B4-BE49-F238E27FC236}">
-                <a16:creationId xmlns:a16="http://schemas.microsoft.com/office/drawing/2014/main" id="{CD63ABBC-CEB2-4B1D-A3EB-3F6B59DBBC06}"/>
+          <p:cNvPr id="3" name="図 2">
+            <a:extLst>
+              <a:ext uri="{FF2B5EF4-FFF2-40B4-BE49-F238E27FC236}">
+                <a16:creationId xmlns:a16="http://schemas.microsoft.com/office/drawing/2014/main" id="{A343769D-65CF-4F0F-ACF1-163A78F7495C}"/>
               </a:ext>
             </a:extLst>
           </p:cNvPr>
@@ -4587,18 +4972,58 @@
         </p:blipFill>
         <p:spPr>
           <a:xfrm>
-            <a:off x="567542" y="1817794"/>
-            <a:ext cx="11288700" cy="4420217"/>
+            <a:off x="567542" y="2187126"/>
+            <a:ext cx="7195966" cy="2491447"/>
           </a:xfrm>
           <a:prstGeom prst="rect">
             <a:avLst/>
           </a:prstGeom>
         </p:spPr>
       </p:pic>
+      <p:sp>
+        <p:nvSpPr>
+          <p:cNvPr id="8" name="テキスト ボックス 7">
+            <a:extLst>
+              <a:ext uri="{FF2B5EF4-FFF2-40B4-BE49-F238E27FC236}">
+                <a16:creationId xmlns:a16="http://schemas.microsoft.com/office/drawing/2014/main" id="{5F40FF26-63C0-490B-9F66-D9CE7DA20658}"/>
+              </a:ext>
+            </a:extLst>
+          </p:cNvPr>
+          <p:cNvSpPr txBox="1"/>
+          <p:nvPr/>
+        </p:nvSpPr>
+        <p:spPr>
+          <a:xfrm>
+            <a:off x="567542" y="4819967"/>
+            <a:ext cx="10956846" cy="461665"/>
+          </a:xfrm>
+          <a:prstGeom prst="rect">
+            <a:avLst/>
+          </a:prstGeom>
+          <a:noFill/>
+        </p:spPr>
+        <p:txBody>
+          <a:bodyPr wrap="none" rtlCol="0">
+            <a:spAutoFit/>
+          </a:bodyPr>
+          <a:lstStyle/>
+          <a:p>
+            <a:r>
+              <a:rPr lang="en-US" altLang="ja-JP" sz="2400" dirty="0"/>
+              <a:t>※</a:t>
+            </a:r>
+            <a:r>
+              <a:rPr lang="ja-JP" altLang="en-US" sz="2400" dirty="0"/>
+              <a:t>当分は自分自身の端末で動作確認するので、自身のアドレスを記載します。</a:t>
+            </a:r>
+            <a:endParaRPr lang="en-US" altLang="ja-JP" sz="2400" dirty="0"/>
+          </a:p>
+        </p:txBody>
+      </p:sp>
     </p:spTree>
     <p:extLst>
       <p:ext uri="{BB962C8B-B14F-4D97-AF65-F5344CB8AC3E}">
-        <p14:creationId xmlns:p14="http://schemas.microsoft.com/office/powerpoint/2010/main" val="3569153919"/>
+        <p14:creationId xmlns:p14="http://schemas.microsoft.com/office/powerpoint/2010/main" val="1216826525"/>
       </p:ext>
     </p:extLst>
   </p:cSld>
@@ -4640,7 +5065,7 @@
         <p:spPr>
           <a:xfrm>
             <a:off x="567542" y="491954"/>
-            <a:ext cx="1005403" cy="584775"/>
+            <a:ext cx="1943161" cy="584775"/>
           </a:xfrm>
           <a:prstGeom prst="rect">
             <a:avLst/>
@@ -4655,7 +5080,7 @@
           <a:p>
             <a:r>
               <a:rPr kumimoji="1" lang="ja-JP" altLang="en-US" sz="3200" b="1" u="sng" dirty="0"/>
-              <a:t>接続</a:t>
+              <a:t>接続 解説</a:t>
             </a:r>
           </a:p>
         </p:txBody>
@@ -4675,7 +5100,7 @@
         <p:spPr>
           <a:xfrm>
             <a:off x="567542" y="1216429"/>
-            <a:ext cx="6803466" cy="461665"/>
+            <a:ext cx="6604693" cy="461665"/>
           </a:xfrm>
           <a:prstGeom prst="rect">
             <a:avLst/>
@@ -4689,27 +5114,39 @@
           <a:lstStyle/>
           <a:p>
             <a:r>
-              <a:rPr kumimoji="1" lang="en-US" altLang="ja-JP" sz="2400" b="1" dirty="0">
+              <a:rPr lang="ja-JP" altLang="en-US" sz="2400" dirty="0"/>
+              <a:t>切断するには</a:t>
+            </a:r>
+            <a:r>
+              <a:rPr lang="en-US" altLang="ja-JP" sz="2400" b="1" dirty="0" err="1">
                 <a:solidFill>
-                  <a:srgbClr val="FF0000"/>
+                  <a:srgbClr val="0070C0"/>
                 </a:solidFill>
               </a:rPr>
-              <a:t>NetworkManager.cpp</a:t>
-            </a:r>
-            <a:r>
-              <a:rPr kumimoji="1" lang="ja-JP" altLang="en-US" sz="2400" dirty="0"/>
-              <a:t>を作ります。（その３）</a:t>
-            </a:r>
-            <a:endParaRPr kumimoji="1" lang="en-US" altLang="ja-JP" sz="2400" dirty="0"/>
+              <a:t>CloseNetwork</a:t>
+            </a:r>
+            <a:r>
+              <a:rPr lang="ja-JP" altLang="en-US" sz="2400" b="1" dirty="0">
+                <a:solidFill>
+                  <a:srgbClr val="0070C0"/>
+                </a:solidFill>
+              </a:rPr>
+              <a:t>関数</a:t>
+            </a:r>
+            <a:r>
+              <a:rPr lang="ja-JP" altLang="en-US" sz="2400" dirty="0"/>
+              <a:t>を呼びます。</a:t>
+            </a:r>
+            <a:endParaRPr lang="en-US" altLang="ja-JP" sz="2400" dirty="0"/>
           </a:p>
         </p:txBody>
       </p:sp>
       <p:pic>
         <p:nvPicPr>
-          <p:cNvPr id="3" name="図 2">
-            <a:extLst>
-              <a:ext uri="{FF2B5EF4-FFF2-40B4-BE49-F238E27FC236}">
-                <a16:creationId xmlns:a16="http://schemas.microsoft.com/office/drawing/2014/main" id="{A504B1E1-FE59-4BA7-8035-0F2F5C9BF0E2}"/>
+          <p:cNvPr id="7" name="図 6">
+            <a:extLst>
+              <a:ext uri="{FF2B5EF4-FFF2-40B4-BE49-F238E27FC236}">
+                <a16:creationId xmlns:a16="http://schemas.microsoft.com/office/drawing/2014/main" id="{69F950EB-E383-4AF7-A0CD-ABA8D1D9D0AD}"/>
               </a:ext>
             </a:extLst>
           </p:cNvPr>
@@ -4726,8 +5163,8 @@
         </p:blipFill>
         <p:spPr>
           <a:xfrm>
-            <a:off x="567542" y="1817795"/>
-            <a:ext cx="4834191" cy="4634368"/>
+            <a:off x="567542" y="1820422"/>
+            <a:ext cx="6862471" cy="3821149"/>
           </a:xfrm>
           <a:prstGeom prst="rect">
             <a:avLst/>
@@ -4737,7 +5174,349 @@
     </p:spTree>
     <p:extLst>
       <p:ext uri="{BB962C8B-B14F-4D97-AF65-F5344CB8AC3E}">
-        <p14:creationId xmlns:p14="http://schemas.microsoft.com/office/powerpoint/2010/main" val="3575599008"/>
+        <p14:creationId xmlns:p14="http://schemas.microsoft.com/office/powerpoint/2010/main" val="4291358040"/>
+      </p:ext>
+    </p:extLst>
+  </p:cSld>
+  <p:clrMapOvr>
+    <a:masterClrMapping/>
+  </p:clrMapOvr>
+</p:sld>
+</file>
+
+<file path=ppt/slides/slide8.xml><?xml version="1.0" encoding="utf-8"?>
+<p:sld xmlns:a="http://schemas.openxmlformats.org/drawingml/2006/main" xmlns:r="http://schemas.openxmlformats.org/officeDocument/2006/relationships" xmlns:p="http://schemas.openxmlformats.org/presentationml/2006/main">
+  <p:cSld>
+    <p:spTree>
+      <p:nvGrpSpPr>
+        <p:cNvPr id="1" name=""/>
+        <p:cNvGrpSpPr/>
+        <p:nvPr/>
+      </p:nvGrpSpPr>
+      <p:grpSpPr>
+        <a:xfrm>
+          <a:off x="0" y="0"/>
+          <a:ext cx="0" cy="0"/>
+          <a:chOff x="0" y="0"/>
+          <a:chExt cx="0" cy="0"/>
+        </a:xfrm>
+      </p:grpSpPr>
+      <p:sp>
+        <p:nvSpPr>
+          <p:cNvPr id="4" name="テキスト ボックス 3">
+            <a:extLst>
+              <a:ext uri="{FF2B5EF4-FFF2-40B4-BE49-F238E27FC236}">
+                <a16:creationId xmlns:a16="http://schemas.microsoft.com/office/drawing/2014/main" id="{5A13BF46-B8C5-48AA-8308-C9ECFF431A18}"/>
+              </a:ext>
+            </a:extLst>
+          </p:cNvPr>
+          <p:cNvSpPr txBox="1"/>
+          <p:nvPr/>
+        </p:nvSpPr>
+        <p:spPr>
+          <a:xfrm>
+            <a:off x="567542" y="491954"/>
+            <a:ext cx="4405373" cy="584775"/>
+          </a:xfrm>
+          <a:prstGeom prst="rect">
+            <a:avLst/>
+          </a:prstGeom>
+          <a:noFill/>
+        </p:spPr>
+        <p:txBody>
+          <a:bodyPr wrap="none" rtlCol="0">
+            <a:spAutoFit/>
+          </a:bodyPr>
+          <a:lstStyle/>
+          <a:p>
+            <a:r>
+              <a:rPr kumimoji="1" lang="ja-JP" altLang="en-US" sz="3200" b="1" u="sng" dirty="0"/>
+              <a:t>接続 クライアント補足</a:t>
+            </a:r>
+          </a:p>
+        </p:txBody>
+      </p:sp>
+      <p:sp>
+        <p:nvSpPr>
+          <p:cNvPr id="6" name="テキスト ボックス 5">
+            <a:extLst>
+              <a:ext uri="{FF2B5EF4-FFF2-40B4-BE49-F238E27FC236}">
+                <a16:creationId xmlns:a16="http://schemas.microsoft.com/office/drawing/2014/main" id="{55830AD6-028B-4C4E-80BF-B70DFC1C3A46}"/>
+              </a:ext>
+            </a:extLst>
+          </p:cNvPr>
+          <p:cNvSpPr txBox="1"/>
+          <p:nvPr/>
+        </p:nvSpPr>
+        <p:spPr>
+          <a:xfrm>
+            <a:off x="567542" y="1216429"/>
+            <a:ext cx="5718232" cy="461665"/>
+          </a:xfrm>
+          <a:prstGeom prst="rect">
+            <a:avLst/>
+          </a:prstGeom>
+          <a:noFill/>
+        </p:spPr>
+        <p:txBody>
+          <a:bodyPr wrap="none" rtlCol="0">
+            <a:spAutoFit/>
+          </a:bodyPr>
+          <a:lstStyle/>
+          <a:p>
+            <a:r>
+              <a:rPr lang="en-US" altLang="ja-JP" sz="2400" dirty="0"/>
+              <a:t>Enter</a:t>
+            </a:r>
+            <a:r>
+              <a:rPr lang="ja-JP" altLang="en-US" sz="2400" dirty="0"/>
+              <a:t>キーで接続します。（</a:t>
+            </a:r>
+            <a:r>
+              <a:rPr lang="en-US" altLang="ja-JP" sz="2400" b="1" dirty="0">
+                <a:solidFill>
+                  <a:srgbClr val="FF0000"/>
+                </a:solidFill>
+              </a:rPr>
+              <a:t>Main.cpp</a:t>
+            </a:r>
+            <a:r>
+              <a:rPr lang="ja-JP" altLang="en-US" sz="2400" dirty="0"/>
+              <a:t>）</a:t>
+            </a:r>
+            <a:endParaRPr lang="en-US" altLang="ja-JP" sz="2400" dirty="0"/>
+          </a:p>
+        </p:txBody>
+      </p:sp>
+      <p:pic>
+        <p:nvPicPr>
+          <p:cNvPr id="3" name="図 2">
+            <a:extLst>
+              <a:ext uri="{FF2B5EF4-FFF2-40B4-BE49-F238E27FC236}">
+                <a16:creationId xmlns:a16="http://schemas.microsoft.com/office/drawing/2014/main" id="{ADBEAEDD-1337-401F-A4CE-C17785CED814}"/>
+              </a:ext>
+            </a:extLst>
+          </p:cNvPr>
+          <p:cNvPicPr>
+            <a:picLocks noChangeAspect="1"/>
+          </p:cNvPicPr>
+          <p:nvPr/>
+        </p:nvPicPr>
+        <p:blipFill>
+          <a:blip r:embed="rId2"/>
+          <a:stretch>
+            <a:fillRect/>
+          </a:stretch>
+        </p:blipFill>
+        <p:spPr>
+          <a:xfrm>
+            <a:off x="567542" y="1817794"/>
+            <a:ext cx="6382641" cy="3400900"/>
+          </a:xfrm>
+          <a:prstGeom prst="rect">
+            <a:avLst/>
+          </a:prstGeom>
+        </p:spPr>
+      </p:pic>
+      <p:sp>
+        <p:nvSpPr>
+          <p:cNvPr id="8" name="テキスト ボックス 7">
+            <a:extLst>
+              <a:ext uri="{FF2B5EF4-FFF2-40B4-BE49-F238E27FC236}">
+                <a16:creationId xmlns:a16="http://schemas.microsoft.com/office/drawing/2014/main" id="{83191439-038E-4E53-8968-6AA61576FF1A}"/>
+              </a:ext>
+            </a:extLst>
+          </p:cNvPr>
+          <p:cNvSpPr txBox="1"/>
+          <p:nvPr/>
+        </p:nvSpPr>
+        <p:spPr>
+          <a:xfrm>
+            <a:off x="567542" y="5357898"/>
+            <a:ext cx="8444941" cy="461665"/>
+          </a:xfrm>
+          <a:prstGeom prst="rect">
+            <a:avLst/>
+          </a:prstGeom>
+          <a:noFill/>
+        </p:spPr>
+        <p:txBody>
+          <a:bodyPr wrap="none" rtlCol="0">
+            <a:spAutoFit/>
+          </a:bodyPr>
+          <a:lstStyle/>
+          <a:p>
+            <a:r>
+              <a:rPr lang="en-US" altLang="ja-JP" sz="2400" dirty="0"/>
+              <a:t>※</a:t>
+            </a:r>
+            <a:r>
+              <a:rPr lang="ja-JP" altLang="en-US" sz="2400" dirty="0"/>
+              <a:t>実際にゲームに実装する際は〇〇</a:t>
+            </a:r>
+            <a:r>
+              <a:rPr lang="en-US" altLang="ja-JP" sz="2400" dirty="0"/>
+              <a:t>Scene</a:t>
+            </a:r>
+            <a:r>
+              <a:rPr lang="ja-JP" altLang="en-US" sz="2400" dirty="0"/>
+              <a:t>でこの処理をする</a:t>
+            </a:r>
+            <a:endParaRPr lang="en-US" altLang="ja-JP" sz="2400" dirty="0"/>
+          </a:p>
+        </p:txBody>
+      </p:sp>
+    </p:spTree>
+    <p:extLst>
+      <p:ext uri="{BB962C8B-B14F-4D97-AF65-F5344CB8AC3E}">
+        <p14:creationId xmlns:p14="http://schemas.microsoft.com/office/powerpoint/2010/main" val="460080772"/>
+      </p:ext>
+    </p:extLst>
+  </p:cSld>
+  <p:clrMapOvr>
+    <a:masterClrMapping/>
+  </p:clrMapOvr>
+</p:sld>
+</file>
+
+<file path=ppt/slides/slide9.xml><?xml version="1.0" encoding="utf-8"?>
+<p:sld xmlns:a="http://schemas.openxmlformats.org/drawingml/2006/main" xmlns:r="http://schemas.openxmlformats.org/officeDocument/2006/relationships" xmlns:p="http://schemas.openxmlformats.org/presentationml/2006/main">
+  <p:cSld>
+    <p:spTree>
+      <p:nvGrpSpPr>
+        <p:cNvPr id="1" name=""/>
+        <p:cNvGrpSpPr/>
+        <p:nvPr/>
+      </p:nvGrpSpPr>
+      <p:grpSpPr>
+        <a:xfrm>
+          <a:off x="0" y="0"/>
+          <a:ext cx="0" cy="0"/>
+          <a:chOff x="0" y="0"/>
+          <a:chExt cx="0" cy="0"/>
+        </a:xfrm>
+      </p:grpSpPr>
+      <p:sp>
+        <p:nvSpPr>
+          <p:cNvPr id="4" name="テキスト ボックス 3">
+            <a:extLst>
+              <a:ext uri="{FF2B5EF4-FFF2-40B4-BE49-F238E27FC236}">
+                <a16:creationId xmlns:a16="http://schemas.microsoft.com/office/drawing/2014/main" id="{5A13BF46-B8C5-48AA-8308-C9ECFF431A18}"/>
+              </a:ext>
+            </a:extLst>
+          </p:cNvPr>
+          <p:cNvSpPr txBox="1"/>
+          <p:nvPr/>
+        </p:nvSpPr>
+        <p:spPr>
+          <a:xfrm>
+            <a:off x="567542" y="491954"/>
+            <a:ext cx="4405373" cy="584775"/>
+          </a:xfrm>
+          <a:prstGeom prst="rect">
+            <a:avLst/>
+          </a:prstGeom>
+          <a:noFill/>
+        </p:spPr>
+        <p:txBody>
+          <a:bodyPr wrap="none" rtlCol="0">
+            <a:spAutoFit/>
+          </a:bodyPr>
+          <a:lstStyle/>
+          <a:p>
+            <a:r>
+              <a:rPr kumimoji="1" lang="ja-JP" altLang="en-US" sz="3200" b="1" u="sng" dirty="0"/>
+              <a:t>接続 クライアント補足</a:t>
+            </a:r>
+          </a:p>
+        </p:txBody>
+      </p:sp>
+      <p:sp>
+        <p:nvSpPr>
+          <p:cNvPr id="6" name="テキスト ボックス 5">
+            <a:extLst>
+              <a:ext uri="{FF2B5EF4-FFF2-40B4-BE49-F238E27FC236}">
+                <a16:creationId xmlns:a16="http://schemas.microsoft.com/office/drawing/2014/main" id="{55830AD6-028B-4C4E-80BF-B70DFC1C3A46}"/>
+              </a:ext>
+            </a:extLst>
+          </p:cNvPr>
+          <p:cNvSpPr txBox="1"/>
+          <p:nvPr/>
+        </p:nvSpPr>
+        <p:spPr>
+          <a:xfrm>
+            <a:off x="567542" y="1216429"/>
+            <a:ext cx="5917004" cy="461665"/>
+          </a:xfrm>
+          <a:prstGeom prst="rect">
+            <a:avLst/>
+          </a:prstGeom>
+          <a:noFill/>
+        </p:spPr>
+        <p:txBody>
+          <a:bodyPr wrap="none" rtlCol="0">
+            <a:spAutoFit/>
+          </a:bodyPr>
+          <a:lstStyle/>
+          <a:p>
+            <a:r>
+              <a:rPr lang="en-US" altLang="ja-JP" sz="2400" dirty="0" err="1"/>
+              <a:t>Ctrl+Q</a:t>
+            </a:r>
+            <a:r>
+              <a:rPr lang="ja-JP" altLang="en-US" sz="2400" dirty="0"/>
+              <a:t>キーで切断します。（</a:t>
+            </a:r>
+            <a:r>
+              <a:rPr lang="en-US" altLang="ja-JP" sz="2400" b="1" dirty="0">
+                <a:solidFill>
+                  <a:srgbClr val="FF0000"/>
+                </a:solidFill>
+              </a:rPr>
+              <a:t>Main.cpp</a:t>
+            </a:r>
+            <a:r>
+              <a:rPr lang="ja-JP" altLang="en-US" sz="2400" dirty="0"/>
+              <a:t>）</a:t>
+            </a:r>
+            <a:endParaRPr lang="en-US" altLang="ja-JP" sz="2400" dirty="0"/>
+          </a:p>
+        </p:txBody>
+      </p:sp>
+      <p:pic>
+        <p:nvPicPr>
+          <p:cNvPr id="5" name="図 4">
+            <a:extLst>
+              <a:ext uri="{FF2B5EF4-FFF2-40B4-BE49-F238E27FC236}">
+                <a16:creationId xmlns:a16="http://schemas.microsoft.com/office/drawing/2014/main" id="{6A6194EF-FCC6-4A3E-BA21-76DCB77D2A58}"/>
+              </a:ext>
+            </a:extLst>
+          </p:cNvPr>
+          <p:cNvPicPr>
+            <a:picLocks noChangeAspect="1"/>
+          </p:cNvPicPr>
+          <p:nvPr/>
+        </p:nvPicPr>
+        <p:blipFill>
+          <a:blip r:embed="rId2"/>
+          <a:stretch>
+            <a:fillRect/>
+          </a:stretch>
+        </p:blipFill>
+        <p:spPr>
+          <a:xfrm>
+            <a:off x="567542" y="1817794"/>
+            <a:ext cx="11046389" cy="2089107"/>
+          </a:xfrm>
+          <a:prstGeom prst="rect">
+            <a:avLst/>
+          </a:prstGeom>
+        </p:spPr>
+      </p:pic>
+    </p:spTree>
+    <p:extLst>
+      <p:ext uri="{BB962C8B-B14F-4D97-AF65-F5344CB8AC3E}">
+        <p14:creationId xmlns:p14="http://schemas.microsoft.com/office/powerpoint/2010/main" val="1430046767"/>
       </p:ext>
     </p:extLst>
   </p:cSld>
